--- a/03-课件PPT/讲次版/第3章-2-讲次 3-2 · Planning 与任务拆解.pptx
+++ b/03-课件PPT/讲次版/第3章-2-讲次 3-2 · Planning 与任务拆解.pptx
@@ -4135,14 +4135,315 @@
       </p:sp>
       <p:sp>
         <p:nvSpPr>
-          <p:cNvPr id="5" name="TextBox 4"/>
+          <p:cNvPr id="5" name="Rounded Rectangle 4"/>
+          <p:cNvSpPr/>
+          <p:nvPr/>
+        </p:nvSpPr>
+        <p:spPr>
+          <a:xfrm>
+            <a:off x="857250" y="2667000"/>
+            <a:ext cx="10477500" cy="1143000"/>
+          </a:xfrm>
+          <a:prstGeom prst="roundRect">
+            <a:avLst>
+              <a:gd name="adj" fmla="val 8000"/>
+            </a:avLst>
+          </a:prstGeom>
+          <a:solidFill>
+            <a:srgbClr val="FFFFFF"/>
+          </a:solidFill>
+          <a:ln w="12700">
+            <a:solidFill>
+              <a:srgbClr val="2563EB"/>
+            </a:solidFill>
+          </a:ln>
+          <a:effectLst/>
+        </p:spPr>
+        <p:style>
+          <a:lnRef idx="1">
+            <a:schemeClr val="accent1"/>
+          </a:lnRef>
+          <a:fillRef idx="3">
+            <a:schemeClr val="accent1"/>
+          </a:fillRef>
+          <a:effectRef idx="2">
+            <a:schemeClr val="accent1"/>
+          </a:effectRef>
+          <a:fontRef idx="minor">
+            <a:schemeClr val="lt1"/>
+          </a:fontRef>
+        </p:style>
+        <p:txBody>
+          <a:bodyPr rtlCol="0" anchor="ctr"/>
+          <a:lstStyle/>
+          <a:p>
+            <a:pPr algn="ctr"/>
+          </a:p>
+        </p:txBody>
+      </p:sp>
+      <p:sp>
+        <p:nvSpPr>
+          <p:cNvPr id="6" name="Rectangle 5"/>
+          <p:cNvSpPr/>
+          <p:nvPr/>
+        </p:nvSpPr>
+        <p:spPr>
+          <a:xfrm>
+            <a:off x="857250" y="2667000"/>
+            <a:ext cx="10477500" cy="57150"/>
+          </a:xfrm>
+          <a:prstGeom prst="rect">
+            <a:avLst/>
+          </a:prstGeom>
+          <a:solidFill>
+            <a:srgbClr val="2563EB"/>
+          </a:solidFill>
+          <a:ln>
+            <a:noFill/>
+          </a:ln>
+          <a:effectLst/>
+        </p:spPr>
+        <p:style>
+          <a:lnRef idx="1">
+            <a:schemeClr val="accent1"/>
+          </a:lnRef>
+          <a:fillRef idx="3">
+            <a:schemeClr val="accent1"/>
+          </a:fillRef>
+          <a:effectRef idx="2">
+            <a:schemeClr val="accent1"/>
+          </a:effectRef>
+          <a:fontRef idx="minor">
+            <a:schemeClr val="lt1"/>
+          </a:fontRef>
+        </p:style>
+        <p:txBody>
+          <a:bodyPr rtlCol="0" anchor="ctr"/>
+          <a:lstStyle/>
+          <a:p>
+            <a:pPr algn="ctr"/>
+          </a:p>
+        </p:txBody>
+      </p:sp>
+      <p:sp>
+        <p:nvSpPr>
+          <p:cNvPr id="7" name="Rounded Rectangle 6"/>
+          <p:cNvSpPr/>
+          <p:nvPr/>
+        </p:nvSpPr>
+        <p:spPr>
+          <a:xfrm>
+            <a:off x="5953125" y="2524125"/>
+            <a:ext cx="285750" cy="285750"/>
+          </a:xfrm>
+          <a:prstGeom prst="roundRect">
+            <a:avLst>
+              <a:gd name="adj" fmla="val 8000"/>
+            </a:avLst>
+          </a:prstGeom>
+          <a:solidFill>
+            <a:srgbClr val="2563EB"/>
+          </a:solidFill>
+          <a:ln>
+            <a:noFill/>
+          </a:ln>
+          <a:effectLst/>
+        </p:spPr>
+        <p:style>
+          <a:lnRef idx="1">
+            <a:schemeClr val="accent1"/>
+          </a:lnRef>
+          <a:fillRef idx="3">
+            <a:schemeClr val="accent1"/>
+          </a:fillRef>
+          <a:effectRef idx="2">
+            <a:schemeClr val="accent1"/>
+          </a:effectRef>
+          <a:fontRef idx="minor">
+            <a:schemeClr val="lt1"/>
+          </a:fontRef>
+        </p:style>
+        <p:txBody>
+          <a:bodyPr rtlCol="0" anchor="ctr"/>
+          <a:lstStyle/>
+          <a:p>
+            <a:pPr algn="ctr"/>
+          </a:p>
+        </p:txBody>
+      </p:sp>
+      <p:sp>
+        <p:nvSpPr>
+          <p:cNvPr id="8" name="TextBox 7"/>
           <p:cNvSpPr txBox="1"/>
           <p:nvPr/>
         </p:nvSpPr>
         <p:spPr>
           <a:xfrm>
-            <a:off x="9334500" y="0"/>
-            <a:ext cx="2667000" cy="704850"/>
+            <a:off x="5953125" y="2514600"/>
+            <a:ext cx="285750" cy="285750"/>
+          </a:xfrm>
+          <a:prstGeom prst="rect">
+            <a:avLst/>
+          </a:prstGeom>
+          <a:noFill/>
+        </p:spPr>
+        <p:txBody>
+          <a:bodyPr wrap="square" anchor="ctr">
+            <a:spAutoFit/>
+          </a:bodyPr>
+          <a:lstStyle/>
+          <a:p>
+            <a:pPr algn="ctr">
+              <a:lnSpc>
+                <a:spcPct val="100000"/>
+              </a:lnSpc>
+            </a:pPr>
+            <a:r>
+              <a:rPr sz="1300" b="1">
+                <a:solidFill>
+                  <a:srgbClr val="FFFFFF"/>
+                </a:solidFill>
+                <a:latin typeface="PingFang SC"/>
+              </a:rPr>
+              <a:t>1</a:t>
+            </a:r>
+          </a:p>
+        </p:txBody>
+      </p:sp>
+      <p:sp>
+        <p:nvSpPr>
+          <p:cNvPr id="9" name="TextBox 8"/>
+          <p:cNvSpPr txBox="1"/>
+          <p:nvPr/>
+        </p:nvSpPr>
+        <p:spPr>
+          <a:xfrm>
+            <a:off x="933450" y="2800350"/>
+            <a:ext cx="10325100" cy="952500"/>
+          </a:xfrm>
+          <a:prstGeom prst="rect">
+            <a:avLst/>
+          </a:prstGeom>
+          <a:noFill/>
+        </p:spPr>
+        <p:txBody>
+          <a:bodyPr wrap="square" anchor="ctr">
+            <a:spAutoFit/>
+          </a:bodyPr>
+          <a:lstStyle/>
+          <a:p>
+            <a:pPr algn="ctr">
+              <a:lnSpc>
+                <a:spcPct val="100000"/>
+              </a:lnSpc>
+            </a:pPr>
+            <a:r>
+              <a:rPr sz="1200" b="1">
+                <a:solidFill>
+                  <a:srgbClr val="475569"/>
+                </a:solidFill>
+                <a:latin typeface="PingFang SC"/>
+              </a:rPr>
+              <a:t>loop=2</a:t>
+            </a:r>
+          </a:p>
+        </p:txBody>
+      </p:sp>
+      <p:sp>
+        <p:nvSpPr>
+          <p:cNvPr id="10" name="Rounded Rectangle 9"/>
+          <p:cNvSpPr/>
+          <p:nvPr/>
+        </p:nvSpPr>
+        <p:spPr>
+          <a:xfrm>
+            <a:off x="857250" y="5715000"/>
+            <a:ext cx="10477500" cy="419100"/>
+          </a:xfrm>
+          <a:prstGeom prst="roundRect">
+            <a:avLst>
+              <a:gd name="adj" fmla="val 8000"/>
+            </a:avLst>
+          </a:prstGeom>
+          <a:solidFill>
+            <a:srgbClr val="F1F5F9"/>
+          </a:solidFill>
+          <a:ln>
+            <a:noFill/>
+          </a:ln>
+          <a:effectLst/>
+        </p:spPr>
+        <p:style>
+          <a:lnRef idx="1">
+            <a:schemeClr val="accent1"/>
+          </a:lnRef>
+          <a:fillRef idx="3">
+            <a:schemeClr val="accent1"/>
+          </a:fillRef>
+          <a:effectRef idx="2">
+            <a:schemeClr val="accent1"/>
+          </a:effectRef>
+          <a:fontRef idx="minor">
+            <a:schemeClr val="lt1"/>
+          </a:fontRef>
+        </p:style>
+        <p:txBody>
+          <a:bodyPr rtlCol="0" anchor="ctr"/>
+          <a:lstStyle/>
+          <a:p>
+            <a:pPr algn="ctr"/>
+          </a:p>
+        </p:txBody>
+      </p:sp>
+      <p:sp>
+        <p:nvSpPr>
+          <p:cNvPr id="11" name="TextBox 10"/>
+          <p:cNvSpPr txBox="1"/>
+          <p:nvPr/>
+        </p:nvSpPr>
+        <p:spPr>
+          <a:xfrm>
+            <a:off x="1009650" y="5715000"/>
+            <a:ext cx="10172700" cy="419100"/>
+          </a:xfrm>
+          <a:prstGeom prst="rect">
+            <a:avLst/>
+          </a:prstGeom>
+          <a:noFill/>
+        </p:spPr>
+        <p:txBody>
+          <a:bodyPr wrap="square" anchor="ctr">
+            <a:spAutoFit/>
+          </a:bodyPr>
+          <a:lstStyle/>
+          <a:p>
+            <a:pPr algn="l">
+              <a:lnSpc>
+                <a:spcPct val="100000"/>
+              </a:lnSpc>
+            </a:pPr>
+            <a:r>
+              <a:rPr sz="1200" b="0">
+                <a:solidFill>
+                  <a:srgbClr val="2563EB"/>
+                </a:solidFill>
+                <a:latin typeface="PingFang SC"/>
+              </a:rPr>
+              <a:t>▶ 修订留痕:为什么改</a:t>
+            </a:r>
+          </a:p>
+        </p:txBody>
+      </p:sp>
+      <p:sp>
+        <p:nvSpPr>
+          <p:cNvPr id="12" name="TextBox 11"/>
+          <p:cNvSpPr txBox="1"/>
+          <p:nvPr/>
+        </p:nvSpPr>
+        <p:spPr>
+          <a:xfrm>
+            <a:off x="10287000" y="6534150"/>
+            <a:ext cx="1619250" cy="266700"/>
           </a:xfrm>
           <a:prstGeom prst="rect">
             <a:avLst/>
@@ -4161,346 +4462,6 @@
               </a:lnSpc>
             </a:pPr>
             <a:r>
-              <a:rPr sz="1100" b="0">
-                <a:solidFill>
-                  <a:srgbClr val="94A3B8"/>
-                </a:solidFill>
-                <a:latin typeface="PingFang SC"/>
-              </a:rPr>
-              <a:t>计划是文档不是契约</a:t>
-            </a:r>
-          </a:p>
-        </p:txBody>
-      </p:sp>
-      <p:sp>
-        <p:nvSpPr>
-          <p:cNvPr id="6" name="Rounded Rectangle 5"/>
-          <p:cNvSpPr/>
-          <p:nvPr/>
-        </p:nvSpPr>
-        <p:spPr>
-          <a:xfrm>
-            <a:off x="857250" y="2667000"/>
-            <a:ext cx="10477500" cy="1143000"/>
-          </a:xfrm>
-          <a:prstGeom prst="roundRect">
-            <a:avLst>
-              <a:gd name="adj" fmla="val 8000"/>
-            </a:avLst>
-          </a:prstGeom>
-          <a:solidFill>
-            <a:srgbClr val="FFFFFF"/>
-          </a:solidFill>
-          <a:ln w="12700">
-            <a:solidFill>
-              <a:srgbClr val="2563EB"/>
-            </a:solidFill>
-          </a:ln>
-          <a:effectLst/>
-        </p:spPr>
-        <p:style>
-          <a:lnRef idx="1">
-            <a:schemeClr val="accent1"/>
-          </a:lnRef>
-          <a:fillRef idx="3">
-            <a:schemeClr val="accent1"/>
-          </a:fillRef>
-          <a:effectRef idx="2">
-            <a:schemeClr val="accent1"/>
-          </a:effectRef>
-          <a:fontRef idx="minor">
-            <a:schemeClr val="lt1"/>
-          </a:fontRef>
-        </p:style>
-        <p:txBody>
-          <a:bodyPr rtlCol="0" anchor="ctr"/>
-          <a:lstStyle/>
-          <a:p>
-            <a:pPr algn="ctr"/>
-          </a:p>
-        </p:txBody>
-      </p:sp>
-      <p:sp>
-        <p:nvSpPr>
-          <p:cNvPr id="7" name="Rectangle 6"/>
-          <p:cNvSpPr/>
-          <p:nvPr/>
-        </p:nvSpPr>
-        <p:spPr>
-          <a:xfrm>
-            <a:off x="857250" y="2667000"/>
-            <a:ext cx="10477500" cy="57150"/>
-          </a:xfrm>
-          <a:prstGeom prst="rect">
-            <a:avLst/>
-          </a:prstGeom>
-          <a:solidFill>
-            <a:srgbClr val="2563EB"/>
-          </a:solidFill>
-          <a:ln>
-            <a:noFill/>
-          </a:ln>
-          <a:effectLst/>
-        </p:spPr>
-        <p:style>
-          <a:lnRef idx="1">
-            <a:schemeClr val="accent1"/>
-          </a:lnRef>
-          <a:fillRef idx="3">
-            <a:schemeClr val="accent1"/>
-          </a:fillRef>
-          <a:effectRef idx="2">
-            <a:schemeClr val="accent1"/>
-          </a:effectRef>
-          <a:fontRef idx="minor">
-            <a:schemeClr val="lt1"/>
-          </a:fontRef>
-        </p:style>
-        <p:txBody>
-          <a:bodyPr rtlCol="0" anchor="ctr"/>
-          <a:lstStyle/>
-          <a:p>
-            <a:pPr algn="ctr"/>
-          </a:p>
-        </p:txBody>
-      </p:sp>
-      <p:sp>
-        <p:nvSpPr>
-          <p:cNvPr id="8" name="Rounded Rectangle 7"/>
-          <p:cNvSpPr/>
-          <p:nvPr/>
-        </p:nvSpPr>
-        <p:spPr>
-          <a:xfrm>
-            <a:off x="5953125" y="2524125"/>
-            <a:ext cx="285750" cy="285750"/>
-          </a:xfrm>
-          <a:prstGeom prst="roundRect">
-            <a:avLst>
-              <a:gd name="adj" fmla="val 8000"/>
-            </a:avLst>
-          </a:prstGeom>
-          <a:solidFill>
-            <a:srgbClr val="2563EB"/>
-          </a:solidFill>
-          <a:ln>
-            <a:noFill/>
-          </a:ln>
-          <a:effectLst/>
-        </p:spPr>
-        <p:style>
-          <a:lnRef idx="1">
-            <a:schemeClr val="accent1"/>
-          </a:lnRef>
-          <a:fillRef idx="3">
-            <a:schemeClr val="accent1"/>
-          </a:fillRef>
-          <a:effectRef idx="2">
-            <a:schemeClr val="accent1"/>
-          </a:effectRef>
-          <a:fontRef idx="minor">
-            <a:schemeClr val="lt1"/>
-          </a:fontRef>
-        </p:style>
-        <p:txBody>
-          <a:bodyPr rtlCol="0" anchor="ctr"/>
-          <a:lstStyle/>
-          <a:p>
-            <a:pPr algn="ctr"/>
-          </a:p>
-        </p:txBody>
-      </p:sp>
-      <p:sp>
-        <p:nvSpPr>
-          <p:cNvPr id="9" name="TextBox 8"/>
-          <p:cNvSpPr txBox="1"/>
-          <p:nvPr/>
-        </p:nvSpPr>
-        <p:spPr>
-          <a:xfrm>
-            <a:off x="5953125" y="2514600"/>
-            <a:ext cx="285750" cy="285750"/>
-          </a:xfrm>
-          <a:prstGeom prst="rect">
-            <a:avLst/>
-          </a:prstGeom>
-          <a:noFill/>
-        </p:spPr>
-        <p:txBody>
-          <a:bodyPr wrap="square" anchor="ctr">
-            <a:spAutoFit/>
-          </a:bodyPr>
-          <a:lstStyle/>
-          <a:p>
-            <a:pPr algn="ctr">
-              <a:lnSpc>
-                <a:spcPct val="100000"/>
-              </a:lnSpc>
-            </a:pPr>
-            <a:r>
-              <a:rPr sz="1300" b="1">
-                <a:solidFill>
-                  <a:srgbClr val="FFFFFF"/>
-                </a:solidFill>
-                <a:latin typeface="PingFang SC"/>
-              </a:rPr>
-              <a:t>1</a:t>
-            </a:r>
-          </a:p>
-        </p:txBody>
-      </p:sp>
-      <p:sp>
-        <p:nvSpPr>
-          <p:cNvPr id="10" name="TextBox 9"/>
-          <p:cNvSpPr txBox="1"/>
-          <p:nvPr/>
-        </p:nvSpPr>
-        <p:spPr>
-          <a:xfrm>
-            <a:off x="933450" y="2800350"/>
-            <a:ext cx="10325100" cy="952500"/>
-          </a:xfrm>
-          <a:prstGeom prst="rect">
-            <a:avLst/>
-          </a:prstGeom>
-          <a:noFill/>
-        </p:spPr>
-        <p:txBody>
-          <a:bodyPr wrap="square" anchor="ctr">
-            <a:spAutoFit/>
-          </a:bodyPr>
-          <a:lstStyle/>
-          <a:p>
-            <a:pPr algn="ctr">
-              <a:lnSpc>
-                <a:spcPct val="100000"/>
-              </a:lnSpc>
-            </a:pPr>
-            <a:r>
-              <a:rPr sz="1200" b="1">
-                <a:solidFill>
-                  <a:srgbClr val="475569"/>
-                </a:solidFill>
-                <a:latin typeface="PingFang SC"/>
-              </a:rPr>
-              <a:t>loop=2|计划是文档不是契约</a:t>
-            </a:r>
-          </a:p>
-        </p:txBody>
-      </p:sp>
-      <p:sp>
-        <p:nvSpPr>
-          <p:cNvPr id="11" name="Rounded Rectangle 10"/>
-          <p:cNvSpPr/>
-          <p:nvPr/>
-        </p:nvSpPr>
-        <p:spPr>
-          <a:xfrm>
-            <a:off x="857250" y="5715000"/>
-            <a:ext cx="10477500" cy="419100"/>
-          </a:xfrm>
-          <a:prstGeom prst="roundRect">
-            <a:avLst>
-              <a:gd name="adj" fmla="val 8000"/>
-            </a:avLst>
-          </a:prstGeom>
-          <a:solidFill>
-            <a:srgbClr val="F1F5F9"/>
-          </a:solidFill>
-          <a:ln>
-            <a:noFill/>
-          </a:ln>
-          <a:effectLst/>
-        </p:spPr>
-        <p:style>
-          <a:lnRef idx="1">
-            <a:schemeClr val="accent1"/>
-          </a:lnRef>
-          <a:fillRef idx="3">
-            <a:schemeClr val="accent1"/>
-          </a:fillRef>
-          <a:effectRef idx="2">
-            <a:schemeClr val="accent1"/>
-          </a:effectRef>
-          <a:fontRef idx="minor">
-            <a:schemeClr val="lt1"/>
-          </a:fontRef>
-        </p:style>
-        <p:txBody>
-          <a:bodyPr rtlCol="0" anchor="ctr"/>
-          <a:lstStyle/>
-          <a:p>
-            <a:pPr algn="ctr"/>
-          </a:p>
-        </p:txBody>
-      </p:sp>
-      <p:sp>
-        <p:nvSpPr>
-          <p:cNvPr id="12" name="TextBox 11"/>
-          <p:cNvSpPr txBox="1"/>
-          <p:nvPr/>
-        </p:nvSpPr>
-        <p:spPr>
-          <a:xfrm>
-            <a:off x="1009650" y="5715000"/>
-            <a:ext cx="10172700" cy="419100"/>
-          </a:xfrm>
-          <a:prstGeom prst="rect">
-            <a:avLst/>
-          </a:prstGeom>
-          <a:noFill/>
-        </p:spPr>
-        <p:txBody>
-          <a:bodyPr wrap="square" anchor="ctr">
-            <a:spAutoFit/>
-          </a:bodyPr>
-          <a:lstStyle/>
-          <a:p>
-            <a:pPr algn="l">
-              <a:lnSpc>
-                <a:spcPct val="100000"/>
-              </a:lnSpc>
-            </a:pPr>
-            <a:r>
-              <a:rPr sz="1200" b="0">
-                <a:solidFill>
-                  <a:srgbClr val="2563EB"/>
-                </a:solidFill>
-                <a:latin typeface="PingFang SC"/>
-              </a:rPr>
-              <a:t>▶ 修订留痕:为什么改</a:t>
-            </a:r>
-          </a:p>
-        </p:txBody>
-      </p:sp>
-      <p:sp>
-        <p:nvSpPr>
-          <p:cNvPr id="13" name="TextBox 12"/>
-          <p:cNvSpPr txBox="1"/>
-          <p:nvPr/>
-        </p:nvSpPr>
-        <p:spPr>
-          <a:xfrm>
-            <a:off x="10287000" y="6534150"/>
-            <a:ext cx="1619250" cy="266700"/>
-          </a:xfrm>
-          <a:prstGeom prst="rect">
-            <a:avLst/>
-          </a:prstGeom>
-          <a:noFill/>
-        </p:spPr>
-        <p:txBody>
-          <a:bodyPr wrap="square" anchor="ctr">
-            <a:spAutoFit/>
-          </a:bodyPr>
-          <a:lstStyle/>
-          <a:p>
-            <a:pPr algn="r">
-              <a:lnSpc>
-                <a:spcPct val="100000"/>
-              </a:lnSpc>
-            </a:pPr>
-            <a:r>
               <a:rPr sz="900" b="0">
                 <a:solidFill>
                   <a:srgbClr val="94A3B8"/>
@@ -4514,7 +4475,7 @@
       </p:sp>
       <p:sp>
         <p:nvSpPr>
-          <p:cNvPr id="14" name="TextBox 13"/>
+          <p:cNvPr id="13" name="TextBox 12"/>
           <p:cNvSpPr txBox="1"/>
           <p:nvPr/>
         </p:nvSpPr>
@@ -6451,7 +6412,7 @@
                 </a:solidFill>
                 <a:latin typeface="PingFang SC"/>
               </a:rPr>
-              <a:t>原子动作+依赖|拆解质量决定执行质量</a:t>
+              <a:t>原子动作+依赖</a:t>
             </a:r>
           </a:p>
         </p:txBody>
@@ -11982,7 +11943,7 @@
                 </a:solidFill>
                 <a:latin typeface="PingFang SC"/>
               </a:rPr>
-              <a:t>终止重启|偏差处理逻辑显式写</a:t>
+              <a:t>终止重启</a:t>
             </a:r>
           </a:p>
         </p:txBody>
@@ -21993,14 +21954,682 @@
       </p:sp>
       <p:sp>
         <p:nvSpPr>
-          <p:cNvPr id="5" name="TextBox 4"/>
+          <p:cNvPr id="5" name="Rounded Rectangle 4"/>
+          <p:cNvSpPr/>
+          <p:nvPr/>
+        </p:nvSpPr>
+        <p:spPr>
+          <a:xfrm>
+            <a:off x="4935855" y="1333500"/>
+            <a:ext cx="2320290" cy="1066800"/>
+          </a:xfrm>
+          <a:prstGeom prst="roundRect">
+            <a:avLst>
+              <a:gd name="adj" fmla="val 8000"/>
+            </a:avLst>
+          </a:prstGeom>
+          <a:solidFill>
+            <a:srgbClr val="FFFFFF"/>
+          </a:solidFill>
+          <a:ln w="12700">
+            <a:solidFill>
+              <a:srgbClr val="8B5CF6"/>
+            </a:solidFill>
+          </a:ln>
+          <a:effectLst/>
+        </p:spPr>
+        <p:style>
+          <a:lnRef idx="1">
+            <a:schemeClr val="accent1"/>
+          </a:lnRef>
+          <a:fillRef idx="3">
+            <a:schemeClr val="accent1"/>
+          </a:fillRef>
+          <a:effectRef idx="2">
+            <a:schemeClr val="accent1"/>
+          </a:effectRef>
+          <a:fontRef idx="minor">
+            <a:schemeClr val="lt1"/>
+          </a:fontRef>
+        </p:style>
+        <p:txBody>
+          <a:bodyPr rtlCol="0" anchor="ctr"/>
+          <a:lstStyle/>
+          <a:p>
+            <a:pPr algn="ctr"/>
+          </a:p>
+        </p:txBody>
+      </p:sp>
+      <p:sp>
+        <p:nvSpPr>
+          <p:cNvPr id="6" name="Rectangle 5"/>
+          <p:cNvSpPr/>
+          <p:nvPr/>
+        </p:nvSpPr>
+        <p:spPr>
+          <a:xfrm>
+            <a:off x="4935855" y="1333500"/>
+            <a:ext cx="57150" cy="1066800"/>
+          </a:xfrm>
+          <a:prstGeom prst="rect">
+            <a:avLst/>
+          </a:prstGeom>
+          <a:solidFill>
+            <a:srgbClr val="8B5CF6"/>
+          </a:solidFill>
+          <a:ln>
+            <a:noFill/>
+          </a:ln>
+          <a:effectLst/>
+        </p:spPr>
+        <p:style>
+          <a:lnRef idx="1">
+            <a:schemeClr val="accent1"/>
+          </a:lnRef>
+          <a:fillRef idx="3">
+            <a:schemeClr val="accent1"/>
+          </a:fillRef>
+          <a:effectRef idx="2">
+            <a:schemeClr val="accent1"/>
+          </a:effectRef>
+          <a:fontRef idx="minor">
+            <a:schemeClr val="lt1"/>
+          </a:fontRef>
+        </p:style>
+        <p:txBody>
+          <a:bodyPr rtlCol="0" anchor="ctr"/>
+          <a:lstStyle/>
+          <a:p>
+            <a:pPr algn="ctr"/>
+          </a:p>
+        </p:txBody>
+      </p:sp>
+      <p:sp>
+        <p:nvSpPr>
+          <p:cNvPr id="7" name="TextBox 6"/>
           <p:cNvSpPr txBox="1"/>
           <p:nvPr/>
         </p:nvSpPr>
         <p:spPr>
           <a:xfrm>
-            <a:off x="9334500" y="0"/>
-            <a:ext cx="2667000" cy="704850"/>
+            <a:off x="5126355" y="1333500"/>
+            <a:ext cx="881710" cy="1066800"/>
+          </a:xfrm>
+          <a:prstGeom prst="rect">
+            <a:avLst/>
+          </a:prstGeom>
+          <a:noFill/>
+        </p:spPr>
+        <p:txBody>
+          <a:bodyPr wrap="square" anchor="ctr">
+            <a:spAutoFit/>
+          </a:bodyPr>
+          <a:lstStyle/>
+          <a:p>
+            <a:pPr algn="l">
+              <a:lnSpc>
+                <a:spcPct val="100000"/>
+              </a:lnSpc>
+            </a:pPr>
+            <a:r>
+              <a:rPr sz="1600" b="1">
+                <a:solidFill>
+                  <a:srgbClr val="8B5CF6"/>
+                </a:solidFill>
+                <a:latin typeface="PingFang SC"/>
+              </a:rPr>
+              <a:t>动态计划</a:t>
+            </a:r>
+          </a:p>
+        </p:txBody>
+      </p:sp>
+      <p:sp>
+        <p:nvSpPr>
+          <p:cNvPr id="8" name="TextBox 7"/>
+          <p:cNvSpPr txBox="1"/>
+          <p:nvPr/>
+        </p:nvSpPr>
+        <p:spPr>
+          <a:xfrm>
+            <a:off x="5863971" y="1333500"/>
+            <a:ext cx="1345768" cy="1066800"/>
+          </a:xfrm>
+          <a:prstGeom prst="rect">
+            <a:avLst/>
+          </a:prstGeom>
+          <a:noFill/>
+        </p:spPr>
+        <p:txBody>
+          <a:bodyPr wrap="square" anchor="ctr">
+            <a:spAutoFit/>
+          </a:bodyPr>
+          <a:lstStyle/>
+          <a:p>
+            <a:pPr algn="l">
+              <a:lnSpc>
+                <a:spcPct val="100000"/>
+              </a:lnSpc>
+            </a:pPr>
+            <a:r>
+              <a:rPr sz="1200" b="0">
+                <a:solidFill>
+                  <a:srgbClr val="475569"/>
+                </a:solidFill>
+                <a:latin typeface="PingFang SC"/>
+              </a:rPr>
+              <a:t>执行中重估,成本高</a:t>
+            </a:r>
+          </a:p>
+        </p:txBody>
+      </p:sp>
+      <p:cxnSp>
+        <p:nvCxnSpPr>
+          <p:cNvPr id="9" name="Connector 8"/>
+          <p:cNvCxnSpPr/>
+          <p:nvPr/>
+        </p:nvCxnSpPr>
+        <p:spPr>
+          <a:xfrm>
+            <a:off x="6096000" y="2419350"/>
+            <a:ext cx="0" cy="171450"/>
+          </a:xfrm>
+          <a:prstGeom prst="line">
+            <a:avLst/>
+          </a:prstGeom>
+          <a:ln w="15240">
+            <a:solidFill>
+              <a:srgbClr val="94A3B8"/>
+            </a:solidFill>
+          </a:ln>
+        </p:spPr>
+        <p:style>
+          <a:lnRef idx="2">
+            <a:schemeClr val="accent1"/>
+          </a:lnRef>
+          <a:fillRef idx="0">
+            <a:schemeClr val="accent1"/>
+          </a:fillRef>
+          <a:effectRef idx="1">
+            <a:schemeClr val="accent1"/>
+          </a:effectRef>
+          <a:fontRef idx="minor">
+            <a:schemeClr val="tx1"/>
+          </a:fontRef>
+        </p:style>
+      </p:cxnSp>
+      <p:sp>
+        <p:nvSpPr>
+          <p:cNvPr id="10" name="Isosceles Triangle 9"/>
+          <p:cNvSpPr/>
+          <p:nvPr/>
+        </p:nvSpPr>
+        <p:spPr>
+          <a:xfrm rot="10800000">
+            <a:off x="6053138" y="2505076"/>
+            <a:ext cx="85725" cy="85725"/>
+          </a:xfrm>
+          <a:prstGeom prst="triangle">
+            <a:avLst/>
+          </a:prstGeom>
+          <a:solidFill>
+            <a:srgbClr val="94A3B8"/>
+          </a:solidFill>
+          <a:ln>
+            <a:noFill/>
+          </a:ln>
+          <a:effectLst/>
+        </p:spPr>
+        <p:style>
+          <a:lnRef idx="1">
+            <a:schemeClr val="accent1"/>
+          </a:lnRef>
+          <a:fillRef idx="3">
+            <a:schemeClr val="accent1"/>
+          </a:fillRef>
+          <a:effectRef idx="2">
+            <a:schemeClr val="accent1"/>
+          </a:effectRef>
+          <a:fontRef idx="minor">
+            <a:schemeClr val="lt1"/>
+          </a:fontRef>
+        </p:style>
+        <p:txBody>
+          <a:bodyPr rtlCol="0" anchor="ctr"/>
+          <a:lstStyle/>
+          <a:p>
+            <a:pPr algn="ctr"/>
+          </a:p>
+        </p:txBody>
+      </p:sp>
+      <p:sp>
+        <p:nvSpPr>
+          <p:cNvPr id="11" name="Rounded Rectangle 10"/>
+          <p:cNvSpPr/>
+          <p:nvPr/>
+        </p:nvSpPr>
+        <p:spPr>
+          <a:xfrm>
+            <a:off x="4134802" y="2609850"/>
+            <a:ext cx="3922395" cy="1066800"/>
+          </a:xfrm>
+          <a:prstGeom prst="roundRect">
+            <a:avLst>
+              <a:gd name="adj" fmla="val 8000"/>
+            </a:avLst>
+          </a:prstGeom>
+          <a:solidFill>
+            <a:srgbClr val="FFFFFF"/>
+          </a:solidFill>
+          <a:ln w="12700">
+            <a:solidFill>
+              <a:srgbClr val="14B8A6"/>
+            </a:solidFill>
+          </a:ln>
+          <a:effectLst/>
+        </p:spPr>
+        <p:style>
+          <a:lnRef idx="1">
+            <a:schemeClr val="accent1"/>
+          </a:lnRef>
+          <a:fillRef idx="3">
+            <a:schemeClr val="accent1"/>
+          </a:fillRef>
+          <a:effectRef idx="2">
+            <a:schemeClr val="accent1"/>
+          </a:effectRef>
+          <a:fontRef idx="minor">
+            <a:schemeClr val="lt1"/>
+          </a:fontRef>
+        </p:style>
+        <p:txBody>
+          <a:bodyPr rtlCol="0" anchor="ctr"/>
+          <a:lstStyle/>
+          <a:p>
+            <a:pPr algn="ctr"/>
+          </a:p>
+        </p:txBody>
+      </p:sp>
+      <p:sp>
+        <p:nvSpPr>
+          <p:cNvPr id="12" name="Rectangle 11"/>
+          <p:cNvSpPr/>
+          <p:nvPr/>
+        </p:nvSpPr>
+        <p:spPr>
+          <a:xfrm>
+            <a:off x="4134802" y="2609850"/>
+            <a:ext cx="57150" cy="1066800"/>
+          </a:xfrm>
+          <a:prstGeom prst="rect">
+            <a:avLst/>
+          </a:prstGeom>
+          <a:solidFill>
+            <a:srgbClr val="14B8A6"/>
+          </a:solidFill>
+          <a:ln>
+            <a:noFill/>
+          </a:ln>
+          <a:effectLst/>
+        </p:spPr>
+        <p:style>
+          <a:lnRef idx="1">
+            <a:schemeClr val="accent1"/>
+          </a:lnRef>
+          <a:fillRef idx="3">
+            <a:schemeClr val="accent1"/>
+          </a:fillRef>
+          <a:effectRef idx="2">
+            <a:schemeClr val="accent1"/>
+          </a:effectRef>
+          <a:fontRef idx="minor">
+            <a:schemeClr val="lt1"/>
+          </a:fontRef>
+        </p:style>
+        <p:txBody>
+          <a:bodyPr rtlCol="0" anchor="ctr"/>
+          <a:lstStyle/>
+          <a:p>
+            <a:pPr algn="ctr"/>
+          </a:p>
+        </p:txBody>
+      </p:sp>
+      <p:sp>
+        <p:nvSpPr>
+          <p:cNvPr id="13" name="TextBox 12"/>
+          <p:cNvSpPr txBox="1"/>
+          <p:nvPr/>
+        </p:nvSpPr>
+        <p:spPr>
+          <a:xfrm>
+            <a:off x="4325302" y="2609850"/>
+            <a:ext cx="1490510" cy="1066800"/>
+          </a:xfrm>
+          <a:prstGeom prst="rect">
+            <a:avLst/>
+          </a:prstGeom>
+          <a:noFill/>
+        </p:spPr>
+        <p:txBody>
+          <a:bodyPr wrap="square" anchor="ctr">
+            <a:spAutoFit/>
+          </a:bodyPr>
+          <a:lstStyle/>
+          <a:p>
+            <a:pPr algn="l">
+              <a:lnSpc>
+                <a:spcPct val="100000"/>
+              </a:lnSpc>
+            </a:pPr>
+            <a:r>
+              <a:rPr sz="1600" b="1">
+                <a:solidFill>
+                  <a:srgbClr val="14B8A6"/>
+                </a:solidFill>
+                <a:latin typeface="PingFang SC"/>
+              </a:rPr>
+              <a:t>一次性计划</a:t>
+            </a:r>
+          </a:p>
+        </p:txBody>
+      </p:sp>
+      <p:sp>
+        <p:nvSpPr>
+          <p:cNvPr id="14" name="TextBox 13"/>
+          <p:cNvSpPr txBox="1"/>
+          <p:nvPr/>
+        </p:nvSpPr>
+        <p:spPr>
+          <a:xfrm>
+            <a:off x="5703760" y="2609850"/>
+            <a:ext cx="2274989" cy="1066800"/>
+          </a:xfrm>
+          <a:prstGeom prst="rect">
+            <a:avLst/>
+          </a:prstGeom>
+          <a:noFill/>
+        </p:spPr>
+        <p:txBody>
+          <a:bodyPr wrap="square" anchor="ctr">
+            <a:spAutoFit/>
+          </a:bodyPr>
+          <a:lstStyle/>
+          <a:p>
+            <a:pPr algn="l">
+              <a:lnSpc>
+                <a:spcPct val="100000"/>
+              </a:lnSpc>
+            </a:pPr>
+            <a:r>
+              <a:rPr sz="1200" b="0">
+                <a:solidFill>
+                  <a:srgbClr val="475569"/>
+                </a:solidFill>
+                <a:latin typeface="PingFang SC"/>
+              </a:rPr>
+              <a:t>目标明确步骤稳</a:t>
+            </a:r>
+          </a:p>
+        </p:txBody>
+      </p:sp>
+      <p:cxnSp>
+        <p:nvCxnSpPr>
+          <p:cNvPr id="15" name="Connector 14"/>
+          <p:cNvCxnSpPr/>
+          <p:nvPr/>
+        </p:nvCxnSpPr>
+        <p:spPr>
+          <a:xfrm>
+            <a:off x="6096000" y="3695700"/>
+            <a:ext cx="0" cy="171450"/>
+          </a:xfrm>
+          <a:prstGeom prst="line">
+            <a:avLst/>
+          </a:prstGeom>
+          <a:ln w="15240">
+            <a:solidFill>
+              <a:srgbClr val="94A3B8"/>
+            </a:solidFill>
+          </a:ln>
+        </p:spPr>
+        <p:style>
+          <a:lnRef idx="2">
+            <a:schemeClr val="accent1"/>
+          </a:lnRef>
+          <a:fillRef idx="0">
+            <a:schemeClr val="accent1"/>
+          </a:fillRef>
+          <a:effectRef idx="1">
+            <a:schemeClr val="accent1"/>
+          </a:effectRef>
+          <a:fontRef idx="minor">
+            <a:schemeClr val="tx1"/>
+          </a:fontRef>
+        </p:style>
+      </p:cxnSp>
+      <p:sp>
+        <p:nvSpPr>
+          <p:cNvPr id="16" name="Isosceles Triangle 15"/>
+          <p:cNvSpPr/>
+          <p:nvPr/>
+        </p:nvSpPr>
+        <p:spPr>
+          <a:xfrm rot="10800000">
+            <a:off x="6053138" y="3781426"/>
+            <a:ext cx="85725" cy="85725"/>
+          </a:xfrm>
+          <a:prstGeom prst="triangle">
+            <a:avLst/>
+          </a:prstGeom>
+          <a:solidFill>
+            <a:srgbClr val="94A3B8"/>
+          </a:solidFill>
+          <a:ln>
+            <a:noFill/>
+          </a:ln>
+          <a:effectLst/>
+        </p:spPr>
+        <p:style>
+          <a:lnRef idx="1">
+            <a:schemeClr val="accent1"/>
+          </a:lnRef>
+          <a:fillRef idx="3">
+            <a:schemeClr val="accent1"/>
+          </a:fillRef>
+          <a:effectRef idx="2">
+            <a:schemeClr val="accent1"/>
+          </a:effectRef>
+          <a:fontRef idx="minor">
+            <a:schemeClr val="lt1"/>
+          </a:fontRef>
+        </p:style>
+        <p:txBody>
+          <a:bodyPr rtlCol="0" anchor="ctr"/>
+          <a:lstStyle/>
+          <a:p>
+            <a:pPr algn="ctr"/>
+          </a:p>
+        </p:txBody>
+      </p:sp>
+      <p:sp>
+        <p:nvSpPr>
+          <p:cNvPr id="17" name="Rounded Rectangle 16"/>
+          <p:cNvSpPr/>
+          <p:nvPr/>
+        </p:nvSpPr>
+        <p:spPr>
+          <a:xfrm>
+            <a:off x="3333750" y="3886200"/>
+            <a:ext cx="5524500" cy="1066800"/>
+          </a:xfrm>
+          <a:prstGeom prst="roundRect">
+            <a:avLst>
+              <a:gd name="adj" fmla="val 8000"/>
+            </a:avLst>
+          </a:prstGeom>
+          <a:solidFill>
+            <a:srgbClr val="FFFFFF"/>
+          </a:solidFill>
+          <a:ln w="12700">
+            <a:solidFill>
+              <a:srgbClr val="2563EB"/>
+            </a:solidFill>
+          </a:ln>
+          <a:effectLst/>
+        </p:spPr>
+        <p:style>
+          <a:lnRef idx="1">
+            <a:schemeClr val="accent1"/>
+          </a:lnRef>
+          <a:fillRef idx="3">
+            <a:schemeClr val="accent1"/>
+          </a:fillRef>
+          <a:effectRef idx="2">
+            <a:schemeClr val="accent1"/>
+          </a:effectRef>
+          <a:fontRef idx="minor">
+            <a:schemeClr val="lt1"/>
+          </a:fontRef>
+        </p:style>
+        <p:txBody>
+          <a:bodyPr rtlCol="0" anchor="ctr"/>
+          <a:lstStyle/>
+          <a:p>
+            <a:pPr algn="ctr"/>
+          </a:p>
+        </p:txBody>
+      </p:sp>
+      <p:sp>
+        <p:nvSpPr>
+          <p:cNvPr id="18" name="Rectangle 17"/>
+          <p:cNvSpPr/>
+          <p:nvPr/>
+        </p:nvSpPr>
+        <p:spPr>
+          <a:xfrm>
+            <a:off x="3333750" y="3886200"/>
+            <a:ext cx="57150" cy="1066800"/>
+          </a:xfrm>
+          <a:prstGeom prst="rect">
+            <a:avLst/>
+          </a:prstGeom>
+          <a:solidFill>
+            <a:srgbClr val="2563EB"/>
+          </a:solidFill>
+          <a:ln>
+            <a:noFill/>
+          </a:ln>
+          <a:effectLst/>
+        </p:spPr>
+        <p:style>
+          <a:lnRef idx="1">
+            <a:schemeClr val="accent1"/>
+          </a:lnRef>
+          <a:fillRef idx="3">
+            <a:schemeClr val="accent1"/>
+          </a:fillRef>
+          <a:effectRef idx="2">
+            <a:schemeClr val="accent1"/>
+          </a:effectRef>
+          <a:fontRef idx="minor">
+            <a:schemeClr val="lt1"/>
+          </a:fontRef>
+        </p:style>
+        <p:txBody>
+          <a:bodyPr rtlCol="0" anchor="ctr"/>
+          <a:lstStyle/>
+          <a:p>
+            <a:pPr algn="ctr"/>
+          </a:p>
+        </p:txBody>
+      </p:sp>
+      <p:sp>
+        <p:nvSpPr>
+          <p:cNvPr id="19" name="TextBox 18"/>
+          <p:cNvSpPr txBox="1"/>
+          <p:nvPr/>
+        </p:nvSpPr>
+        <p:spPr>
+          <a:xfrm>
+            <a:off x="3524250" y="3886200"/>
+            <a:ext cx="2099310" cy="1066800"/>
+          </a:xfrm>
+          <a:prstGeom prst="rect">
+            <a:avLst/>
+          </a:prstGeom>
+          <a:noFill/>
+        </p:spPr>
+        <p:txBody>
+          <a:bodyPr wrap="square" anchor="ctr">
+            <a:spAutoFit/>
+          </a:bodyPr>
+          <a:lstStyle/>
+          <a:p>
+            <a:pPr algn="l">
+              <a:lnSpc>
+                <a:spcPct val="100000"/>
+              </a:lnSpc>
+            </a:pPr>
+            <a:r>
+              <a:rPr sz="1600" b="1">
+                <a:solidFill>
+                  <a:srgbClr val="2563EB"/>
+                </a:solidFill>
+                <a:latin typeface="PingFang SC"/>
+              </a:rPr>
+              <a:t>无 Planner</a:t>
+            </a:r>
+          </a:p>
+        </p:txBody>
+      </p:sp>
+      <p:sp>
+        <p:nvSpPr>
+          <p:cNvPr id="20" name="TextBox 19"/>
+          <p:cNvSpPr txBox="1"/>
+          <p:nvPr/>
+        </p:nvSpPr>
+        <p:spPr>
+          <a:xfrm>
+            <a:off x="5543550" y="3886200"/>
+            <a:ext cx="3204210" cy="1066800"/>
+          </a:xfrm>
+          <a:prstGeom prst="rect">
+            <a:avLst/>
+          </a:prstGeom>
+          <a:noFill/>
+        </p:spPr>
+        <p:txBody>
+          <a:bodyPr wrap="square" anchor="ctr">
+            <a:spAutoFit/>
+          </a:bodyPr>
+          <a:lstStyle/>
+          <a:p>
+            <a:pPr algn="l">
+              <a:lnSpc>
+                <a:spcPct val="100000"/>
+              </a:lnSpc>
+            </a:pPr>
+            <a:r>
+              <a:rPr sz="1200" b="0">
+                <a:solidFill>
+                  <a:srgbClr val="475569"/>
+                </a:solidFill>
+                <a:latin typeface="PingFang SC"/>
+              </a:rPr>
+              <a:t>两步内直接做</a:t>
+            </a:r>
+          </a:p>
+        </p:txBody>
+      </p:sp>
+      <p:sp>
+        <p:nvSpPr>
+          <p:cNvPr id="21" name="TextBox 20"/>
+          <p:cNvSpPr txBox="1"/>
+          <p:nvPr/>
+        </p:nvSpPr>
+        <p:spPr>
+          <a:xfrm>
+            <a:off x="10287000" y="6534150"/>
+            <a:ext cx="1619250" cy="266700"/>
           </a:xfrm>
           <a:prstGeom prst="rect">
             <a:avLst/>
@@ -22019,713 +22648,6 @@
               </a:lnSpc>
             </a:pPr>
             <a:r>
-              <a:rPr sz="1100" b="0">
-                <a:solidFill>
-                  <a:srgbClr val="94A3B8"/>
-                </a:solidFill>
-                <a:latin typeface="PingFang SC"/>
-              </a:rPr>
-              <a:t>动态计划:执行中重估,成本高;一次性计划:目标明确步骤稳;无 Planner:两步内直接做|自顶向下按复杂度选</a:t>
-            </a:r>
-          </a:p>
-        </p:txBody>
-      </p:sp>
-      <p:sp>
-        <p:nvSpPr>
-          <p:cNvPr id="6" name="Rounded Rectangle 5"/>
-          <p:cNvSpPr/>
-          <p:nvPr/>
-        </p:nvSpPr>
-        <p:spPr>
-          <a:xfrm>
-            <a:off x="4935855" y="1333500"/>
-            <a:ext cx="2320290" cy="1066800"/>
-          </a:xfrm>
-          <a:prstGeom prst="roundRect">
-            <a:avLst>
-              <a:gd name="adj" fmla="val 8000"/>
-            </a:avLst>
-          </a:prstGeom>
-          <a:solidFill>
-            <a:srgbClr val="FFFFFF"/>
-          </a:solidFill>
-          <a:ln w="12700">
-            <a:solidFill>
-              <a:srgbClr val="8B5CF6"/>
-            </a:solidFill>
-          </a:ln>
-          <a:effectLst/>
-        </p:spPr>
-        <p:style>
-          <a:lnRef idx="1">
-            <a:schemeClr val="accent1"/>
-          </a:lnRef>
-          <a:fillRef idx="3">
-            <a:schemeClr val="accent1"/>
-          </a:fillRef>
-          <a:effectRef idx="2">
-            <a:schemeClr val="accent1"/>
-          </a:effectRef>
-          <a:fontRef idx="minor">
-            <a:schemeClr val="lt1"/>
-          </a:fontRef>
-        </p:style>
-        <p:txBody>
-          <a:bodyPr rtlCol="0" anchor="ctr"/>
-          <a:lstStyle/>
-          <a:p>
-            <a:pPr algn="ctr"/>
-          </a:p>
-        </p:txBody>
-      </p:sp>
-      <p:sp>
-        <p:nvSpPr>
-          <p:cNvPr id="7" name="Rectangle 6"/>
-          <p:cNvSpPr/>
-          <p:nvPr/>
-        </p:nvSpPr>
-        <p:spPr>
-          <a:xfrm>
-            <a:off x="4935855" y="1333500"/>
-            <a:ext cx="57150" cy="1066800"/>
-          </a:xfrm>
-          <a:prstGeom prst="rect">
-            <a:avLst/>
-          </a:prstGeom>
-          <a:solidFill>
-            <a:srgbClr val="8B5CF6"/>
-          </a:solidFill>
-          <a:ln>
-            <a:noFill/>
-          </a:ln>
-          <a:effectLst/>
-        </p:spPr>
-        <p:style>
-          <a:lnRef idx="1">
-            <a:schemeClr val="accent1"/>
-          </a:lnRef>
-          <a:fillRef idx="3">
-            <a:schemeClr val="accent1"/>
-          </a:fillRef>
-          <a:effectRef idx="2">
-            <a:schemeClr val="accent1"/>
-          </a:effectRef>
-          <a:fontRef idx="minor">
-            <a:schemeClr val="lt1"/>
-          </a:fontRef>
-        </p:style>
-        <p:txBody>
-          <a:bodyPr rtlCol="0" anchor="ctr"/>
-          <a:lstStyle/>
-          <a:p>
-            <a:pPr algn="ctr"/>
-          </a:p>
-        </p:txBody>
-      </p:sp>
-      <p:sp>
-        <p:nvSpPr>
-          <p:cNvPr id="8" name="TextBox 7"/>
-          <p:cNvSpPr txBox="1"/>
-          <p:nvPr/>
-        </p:nvSpPr>
-        <p:spPr>
-          <a:xfrm>
-            <a:off x="5126355" y="1333500"/>
-            <a:ext cx="881710" cy="1066800"/>
-          </a:xfrm>
-          <a:prstGeom prst="rect">
-            <a:avLst/>
-          </a:prstGeom>
-          <a:noFill/>
-        </p:spPr>
-        <p:txBody>
-          <a:bodyPr wrap="square" anchor="ctr">
-            <a:spAutoFit/>
-          </a:bodyPr>
-          <a:lstStyle/>
-          <a:p>
-            <a:pPr algn="l">
-              <a:lnSpc>
-                <a:spcPct val="100000"/>
-              </a:lnSpc>
-            </a:pPr>
-            <a:r>
-              <a:rPr sz="1600" b="1">
-                <a:solidFill>
-                  <a:srgbClr val="8B5CF6"/>
-                </a:solidFill>
-                <a:latin typeface="PingFang SC"/>
-              </a:rPr>
-              <a:t>动态计划</a:t>
-            </a:r>
-          </a:p>
-        </p:txBody>
-      </p:sp>
-      <p:sp>
-        <p:nvSpPr>
-          <p:cNvPr id="9" name="TextBox 8"/>
-          <p:cNvSpPr txBox="1"/>
-          <p:nvPr/>
-        </p:nvSpPr>
-        <p:spPr>
-          <a:xfrm>
-            <a:off x="5863971" y="1333500"/>
-            <a:ext cx="1345768" cy="1066800"/>
-          </a:xfrm>
-          <a:prstGeom prst="rect">
-            <a:avLst/>
-          </a:prstGeom>
-          <a:noFill/>
-        </p:spPr>
-        <p:txBody>
-          <a:bodyPr wrap="square" anchor="ctr">
-            <a:spAutoFit/>
-          </a:bodyPr>
-          <a:lstStyle/>
-          <a:p>
-            <a:pPr algn="l">
-              <a:lnSpc>
-                <a:spcPct val="100000"/>
-              </a:lnSpc>
-            </a:pPr>
-            <a:r>
-              <a:rPr sz="1200" b="0">
-                <a:solidFill>
-                  <a:srgbClr val="475569"/>
-                </a:solidFill>
-                <a:latin typeface="PingFang SC"/>
-              </a:rPr>
-              <a:t>执行中重估,成本高</a:t>
-            </a:r>
-          </a:p>
-        </p:txBody>
-      </p:sp>
-      <p:cxnSp>
-        <p:nvCxnSpPr>
-          <p:cNvPr id="10" name="Connector 9"/>
-          <p:cNvCxnSpPr/>
-          <p:nvPr/>
-        </p:nvCxnSpPr>
-        <p:spPr>
-          <a:xfrm>
-            <a:off x="6096000" y="2419350"/>
-            <a:ext cx="0" cy="171450"/>
-          </a:xfrm>
-          <a:prstGeom prst="line">
-            <a:avLst/>
-          </a:prstGeom>
-          <a:ln w="15240">
-            <a:solidFill>
-              <a:srgbClr val="94A3B8"/>
-            </a:solidFill>
-          </a:ln>
-        </p:spPr>
-        <p:style>
-          <a:lnRef idx="2">
-            <a:schemeClr val="accent1"/>
-          </a:lnRef>
-          <a:fillRef idx="0">
-            <a:schemeClr val="accent1"/>
-          </a:fillRef>
-          <a:effectRef idx="1">
-            <a:schemeClr val="accent1"/>
-          </a:effectRef>
-          <a:fontRef idx="minor">
-            <a:schemeClr val="tx1"/>
-          </a:fontRef>
-        </p:style>
-      </p:cxnSp>
-      <p:sp>
-        <p:nvSpPr>
-          <p:cNvPr id="11" name="Isosceles Triangle 10"/>
-          <p:cNvSpPr/>
-          <p:nvPr/>
-        </p:nvSpPr>
-        <p:spPr>
-          <a:xfrm rot="10800000">
-            <a:off x="6053138" y="2505076"/>
-            <a:ext cx="85725" cy="85725"/>
-          </a:xfrm>
-          <a:prstGeom prst="triangle">
-            <a:avLst/>
-          </a:prstGeom>
-          <a:solidFill>
-            <a:srgbClr val="94A3B8"/>
-          </a:solidFill>
-          <a:ln>
-            <a:noFill/>
-          </a:ln>
-          <a:effectLst/>
-        </p:spPr>
-        <p:style>
-          <a:lnRef idx="1">
-            <a:schemeClr val="accent1"/>
-          </a:lnRef>
-          <a:fillRef idx="3">
-            <a:schemeClr val="accent1"/>
-          </a:fillRef>
-          <a:effectRef idx="2">
-            <a:schemeClr val="accent1"/>
-          </a:effectRef>
-          <a:fontRef idx="minor">
-            <a:schemeClr val="lt1"/>
-          </a:fontRef>
-        </p:style>
-        <p:txBody>
-          <a:bodyPr rtlCol="0" anchor="ctr"/>
-          <a:lstStyle/>
-          <a:p>
-            <a:pPr algn="ctr"/>
-          </a:p>
-        </p:txBody>
-      </p:sp>
-      <p:sp>
-        <p:nvSpPr>
-          <p:cNvPr id="12" name="Rounded Rectangle 11"/>
-          <p:cNvSpPr/>
-          <p:nvPr/>
-        </p:nvSpPr>
-        <p:spPr>
-          <a:xfrm>
-            <a:off x="4134802" y="2609850"/>
-            <a:ext cx="3922395" cy="1066800"/>
-          </a:xfrm>
-          <a:prstGeom prst="roundRect">
-            <a:avLst>
-              <a:gd name="adj" fmla="val 8000"/>
-            </a:avLst>
-          </a:prstGeom>
-          <a:solidFill>
-            <a:srgbClr val="FFFFFF"/>
-          </a:solidFill>
-          <a:ln w="12700">
-            <a:solidFill>
-              <a:srgbClr val="14B8A6"/>
-            </a:solidFill>
-          </a:ln>
-          <a:effectLst/>
-        </p:spPr>
-        <p:style>
-          <a:lnRef idx="1">
-            <a:schemeClr val="accent1"/>
-          </a:lnRef>
-          <a:fillRef idx="3">
-            <a:schemeClr val="accent1"/>
-          </a:fillRef>
-          <a:effectRef idx="2">
-            <a:schemeClr val="accent1"/>
-          </a:effectRef>
-          <a:fontRef idx="minor">
-            <a:schemeClr val="lt1"/>
-          </a:fontRef>
-        </p:style>
-        <p:txBody>
-          <a:bodyPr rtlCol="0" anchor="ctr"/>
-          <a:lstStyle/>
-          <a:p>
-            <a:pPr algn="ctr"/>
-          </a:p>
-        </p:txBody>
-      </p:sp>
-      <p:sp>
-        <p:nvSpPr>
-          <p:cNvPr id="13" name="Rectangle 12"/>
-          <p:cNvSpPr/>
-          <p:nvPr/>
-        </p:nvSpPr>
-        <p:spPr>
-          <a:xfrm>
-            <a:off x="4134802" y="2609850"/>
-            <a:ext cx="57150" cy="1066800"/>
-          </a:xfrm>
-          <a:prstGeom prst="rect">
-            <a:avLst/>
-          </a:prstGeom>
-          <a:solidFill>
-            <a:srgbClr val="14B8A6"/>
-          </a:solidFill>
-          <a:ln>
-            <a:noFill/>
-          </a:ln>
-          <a:effectLst/>
-        </p:spPr>
-        <p:style>
-          <a:lnRef idx="1">
-            <a:schemeClr val="accent1"/>
-          </a:lnRef>
-          <a:fillRef idx="3">
-            <a:schemeClr val="accent1"/>
-          </a:fillRef>
-          <a:effectRef idx="2">
-            <a:schemeClr val="accent1"/>
-          </a:effectRef>
-          <a:fontRef idx="minor">
-            <a:schemeClr val="lt1"/>
-          </a:fontRef>
-        </p:style>
-        <p:txBody>
-          <a:bodyPr rtlCol="0" anchor="ctr"/>
-          <a:lstStyle/>
-          <a:p>
-            <a:pPr algn="ctr"/>
-          </a:p>
-        </p:txBody>
-      </p:sp>
-      <p:sp>
-        <p:nvSpPr>
-          <p:cNvPr id="14" name="TextBox 13"/>
-          <p:cNvSpPr txBox="1"/>
-          <p:nvPr/>
-        </p:nvSpPr>
-        <p:spPr>
-          <a:xfrm>
-            <a:off x="4325302" y="2609850"/>
-            <a:ext cx="1490510" cy="1066800"/>
-          </a:xfrm>
-          <a:prstGeom prst="rect">
-            <a:avLst/>
-          </a:prstGeom>
-          <a:noFill/>
-        </p:spPr>
-        <p:txBody>
-          <a:bodyPr wrap="square" anchor="ctr">
-            <a:spAutoFit/>
-          </a:bodyPr>
-          <a:lstStyle/>
-          <a:p>
-            <a:pPr algn="l">
-              <a:lnSpc>
-                <a:spcPct val="100000"/>
-              </a:lnSpc>
-            </a:pPr>
-            <a:r>
-              <a:rPr sz="1600" b="1">
-                <a:solidFill>
-                  <a:srgbClr val="14B8A6"/>
-                </a:solidFill>
-                <a:latin typeface="PingFang SC"/>
-              </a:rPr>
-              <a:t>一次性计划</a:t>
-            </a:r>
-          </a:p>
-        </p:txBody>
-      </p:sp>
-      <p:sp>
-        <p:nvSpPr>
-          <p:cNvPr id="15" name="TextBox 14"/>
-          <p:cNvSpPr txBox="1"/>
-          <p:nvPr/>
-        </p:nvSpPr>
-        <p:spPr>
-          <a:xfrm>
-            <a:off x="5703760" y="2609850"/>
-            <a:ext cx="2274989" cy="1066800"/>
-          </a:xfrm>
-          <a:prstGeom prst="rect">
-            <a:avLst/>
-          </a:prstGeom>
-          <a:noFill/>
-        </p:spPr>
-        <p:txBody>
-          <a:bodyPr wrap="square" anchor="ctr">
-            <a:spAutoFit/>
-          </a:bodyPr>
-          <a:lstStyle/>
-          <a:p>
-            <a:pPr algn="l">
-              <a:lnSpc>
-                <a:spcPct val="100000"/>
-              </a:lnSpc>
-            </a:pPr>
-            <a:r>
-              <a:rPr sz="1200" b="0">
-                <a:solidFill>
-                  <a:srgbClr val="475569"/>
-                </a:solidFill>
-                <a:latin typeface="PingFang SC"/>
-              </a:rPr>
-              <a:t>目标明确步骤稳</a:t>
-            </a:r>
-          </a:p>
-        </p:txBody>
-      </p:sp>
-      <p:cxnSp>
-        <p:nvCxnSpPr>
-          <p:cNvPr id="16" name="Connector 15"/>
-          <p:cNvCxnSpPr/>
-          <p:nvPr/>
-        </p:nvCxnSpPr>
-        <p:spPr>
-          <a:xfrm>
-            <a:off x="6096000" y="3695700"/>
-            <a:ext cx="0" cy="171450"/>
-          </a:xfrm>
-          <a:prstGeom prst="line">
-            <a:avLst/>
-          </a:prstGeom>
-          <a:ln w="15240">
-            <a:solidFill>
-              <a:srgbClr val="94A3B8"/>
-            </a:solidFill>
-          </a:ln>
-        </p:spPr>
-        <p:style>
-          <a:lnRef idx="2">
-            <a:schemeClr val="accent1"/>
-          </a:lnRef>
-          <a:fillRef idx="0">
-            <a:schemeClr val="accent1"/>
-          </a:fillRef>
-          <a:effectRef idx="1">
-            <a:schemeClr val="accent1"/>
-          </a:effectRef>
-          <a:fontRef idx="minor">
-            <a:schemeClr val="tx1"/>
-          </a:fontRef>
-        </p:style>
-      </p:cxnSp>
-      <p:sp>
-        <p:nvSpPr>
-          <p:cNvPr id="17" name="Isosceles Triangle 16"/>
-          <p:cNvSpPr/>
-          <p:nvPr/>
-        </p:nvSpPr>
-        <p:spPr>
-          <a:xfrm rot="10800000">
-            <a:off x="6053138" y="3781426"/>
-            <a:ext cx="85725" cy="85725"/>
-          </a:xfrm>
-          <a:prstGeom prst="triangle">
-            <a:avLst/>
-          </a:prstGeom>
-          <a:solidFill>
-            <a:srgbClr val="94A3B8"/>
-          </a:solidFill>
-          <a:ln>
-            <a:noFill/>
-          </a:ln>
-          <a:effectLst/>
-        </p:spPr>
-        <p:style>
-          <a:lnRef idx="1">
-            <a:schemeClr val="accent1"/>
-          </a:lnRef>
-          <a:fillRef idx="3">
-            <a:schemeClr val="accent1"/>
-          </a:fillRef>
-          <a:effectRef idx="2">
-            <a:schemeClr val="accent1"/>
-          </a:effectRef>
-          <a:fontRef idx="minor">
-            <a:schemeClr val="lt1"/>
-          </a:fontRef>
-        </p:style>
-        <p:txBody>
-          <a:bodyPr rtlCol="0" anchor="ctr"/>
-          <a:lstStyle/>
-          <a:p>
-            <a:pPr algn="ctr"/>
-          </a:p>
-        </p:txBody>
-      </p:sp>
-      <p:sp>
-        <p:nvSpPr>
-          <p:cNvPr id="18" name="Rounded Rectangle 17"/>
-          <p:cNvSpPr/>
-          <p:nvPr/>
-        </p:nvSpPr>
-        <p:spPr>
-          <a:xfrm>
-            <a:off x="3333750" y="3886200"/>
-            <a:ext cx="5524500" cy="1066800"/>
-          </a:xfrm>
-          <a:prstGeom prst="roundRect">
-            <a:avLst>
-              <a:gd name="adj" fmla="val 8000"/>
-            </a:avLst>
-          </a:prstGeom>
-          <a:solidFill>
-            <a:srgbClr val="FFFFFF"/>
-          </a:solidFill>
-          <a:ln w="12700">
-            <a:solidFill>
-              <a:srgbClr val="2563EB"/>
-            </a:solidFill>
-          </a:ln>
-          <a:effectLst/>
-        </p:spPr>
-        <p:style>
-          <a:lnRef idx="1">
-            <a:schemeClr val="accent1"/>
-          </a:lnRef>
-          <a:fillRef idx="3">
-            <a:schemeClr val="accent1"/>
-          </a:fillRef>
-          <a:effectRef idx="2">
-            <a:schemeClr val="accent1"/>
-          </a:effectRef>
-          <a:fontRef idx="minor">
-            <a:schemeClr val="lt1"/>
-          </a:fontRef>
-        </p:style>
-        <p:txBody>
-          <a:bodyPr rtlCol="0" anchor="ctr"/>
-          <a:lstStyle/>
-          <a:p>
-            <a:pPr algn="ctr"/>
-          </a:p>
-        </p:txBody>
-      </p:sp>
-      <p:sp>
-        <p:nvSpPr>
-          <p:cNvPr id="19" name="Rectangle 18"/>
-          <p:cNvSpPr/>
-          <p:nvPr/>
-        </p:nvSpPr>
-        <p:spPr>
-          <a:xfrm>
-            <a:off x="3333750" y="3886200"/>
-            <a:ext cx="57150" cy="1066800"/>
-          </a:xfrm>
-          <a:prstGeom prst="rect">
-            <a:avLst/>
-          </a:prstGeom>
-          <a:solidFill>
-            <a:srgbClr val="2563EB"/>
-          </a:solidFill>
-          <a:ln>
-            <a:noFill/>
-          </a:ln>
-          <a:effectLst/>
-        </p:spPr>
-        <p:style>
-          <a:lnRef idx="1">
-            <a:schemeClr val="accent1"/>
-          </a:lnRef>
-          <a:fillRef idx="3">
-            <a:schemeClr val="accent1"/>
-          </a:fillRef>
-          <a:effectRef idx="2">
-            <a:schemeClr val="accent1"/>
-          </a:effectRef>
-          <a:fontRef idx="minor">
-            <a:schemeClr val="lt1"/>
-          </a:fontRef>
-        </p:style>
-        <p:txBody>
-          <a:bodyPr rtlCol="0" anchor="ctr"/>
-          <a:lstStyle/>
-          <a:p>
-            <a:pPr algn="ctr"/>
-          </a:p>
-        </p:txBody>
-      </p:sp>
-      <p:sp>
-        <p:nvSpPr>
-          <p:cNvPr id="20" name="TextBox 19"/>
-          <p:cNvSpPr txBox="1"/>
-          <p:nvPr/>
-        </p:nvSpPr>
-        <p:spPr>
-          <a:xfrm>
-            <a:off x="3524250" y="3886200"/>
-            <a:ext cx="2099310" cy="1066800"/>
-          </a:xfrm>
-          <a:prstGeom prst="rect">
-            <a:avLst/>
-          </a:prstGeom>
-          <a:noFill/>
-        </p:spPr>
-        <p:txBody>
-          <a:bodyPr wrap="square" anchor="ctr">
-            <a:spAutoFit/>
-          </a:bodyPr>
-          <a:lstStyle/>
-          <a:p>
-            <a:pPr algn="l">
-              <a:lnSpc>
-                <a:spcPct val="100000"/>
-              </a:lnSpc>
-            </a:pPr>
-            <a:r>
-              <a:rPr sz="1600" b="1">
-                <a:solidFill>
-                  <a:srgbClr val="2563EB"/>
-                </a:solidFill>
-                <a:latin typeface="PingFang SC"/>
-              </a:rPr>
-              <a:t>无 Planner</a:t>
-            </a:r>
-          </a:p>
-        </p:txBody>
-      </p:sp>
-      <p:sp>
-        <p:nvSpPr>
-          <p:cNvPr id="21" name="TextBox 20"/>
-          <p:cNvSpPr txBox="1"/>
-          <p:nvPr/>
-        </p:nvSpPr>
-        <p:spPr>
-          <a:xfrm>
-            <a:off x="5543550" y="3886200"/>
-            <a:ext cx="3204210" cy="1066800"/>
-          </a:xfrm>
-          <a:prstGeom prst="rect">
-            <a:avLst/>
-          </a:prstGeom>
-          <a:noFill/>
-        </p:spPr>
-        <p:txBody>
-          <a:bodyPr wrap="square" anchor="ctr">
-            <a:spAutoFit/>
-          </a:bodyPr>
-          <a:lstStyle/>
-          <a:p>
-            <a:pPr algn="l">
-              <a:lnSpc>
-                <a:spcPct val="100000"/>
-              </a:lnSpc>
-            </a:pPr>
-            <a:r>
-              <a:rPr sz="1200" b="0">
-                <a:solidFill>
-                  <a:srgbClr val="475569"/>
-                </a:solidFill>
-                <a:latin typeface="PingFang SC"/>
-              </a:rPr>
-              <a:t>两步内直接做|自顶向下按复杂度选</a:t>
-            </a:r>
-          </a:p>
-        </p:txBody>
-      </p:sp>
-      <p:sp>
-        <p:nvSpPr>
-          <p:cNvPr id="22" name="TextBox 21"/>
-          <p:cNvSpPr txBox="1"/>
-          <p:nvPr/>
-        </p:nvSpPr>
-        <p:spPr>
-          <a:xfrm>
-            <a:off x="10287000" y="6534150"/>
-            <a:ext cx="1619250" cy="266700"/>
-          </a:xfrm>
-          <a:prstGeom prst="rect">
-            <a:avLst/>
-          </a:prstGeom>
-          <a:noFill/>
-        </p:spPr>
-        <p:txBody>
-          <a:bodyPr wrap="square" anchor="ctr">
-            <a:spAutoFit/>
-          </a:bodyPr>
-          <a:lstStyle/>
-          <a:p>
-            <a:pPr algn="r">
-              <a:lnSpc>
-                <a:spcPct val="100000"/>
-              </a:lnSpc>
-            </a:pPr>
-            <a:r>
               <a:rPr sz="900" b="0">
                 <a:solidFill>
                   <a:srgbClr val="94A3B8"/>
@@ -22739,7 +22661,7 @@
       </p:sp>
       <p:sp>
         <p:nvSpPr>
-          <p:cNvPr id="23" name="TextBox 22"/>
+          <p:cNvPr id="22" name="TextBox 21"/>
           <p:cNvSpPr txBox="1"/>
           <p:nvPr/>
         </p:nvSpPr>
@@ -23936,7 +23858,7 @@
                 </a:solidFill>
                 <a:latin typeface="PingFang SC"/>
               </a:rPr>
-              <a:t>确定性 vs 灵活性|按任务稳定性选</a:t>
+              <a:t>确定性 vs 灵活性</a:t>
             </a:r>
           </a:p>
         </p:txBody>
